--- a/2022182034 임성진 REAL_VS_SUPER_1차 보고서(2차 발표).pptx
+++ b/2022182034 임성진 REAL_VS_SUPER_1차 보고서(2차 발표).pptx
@@ -4,11 +4,15 @@
   <p:sldMasterIdLst>
     <p:sldMasterId id="2147483648" r:id="rId1"/>
   </p:sldMasterIdLst>
+  <p:notesMasterIdLst>
+    <p:notesMasterId r:id="rId7"/>
+  </p:notesMasterIdLst>
   <p:sldIdLst>
     <p:sldId id="256" r:id="rId2"/>
     <p:sldId id="264" r:id="rId3"/>
     <p:sldId id="265" r:id="rId4"/>
     <p:sldId id="266" r:id="rId5"/>
+    <p:sldId id="267" r:id="rId6"/>
   </p:sldIdLst>
   <p:sldSz cx="12192000" cy="6858000"/>
   <p:notesSz cx="6858000" cy="9144000"/>
@@ -113,6 +117,547 @@
     </p:ext>
   </p:extLst>
 </p:presentation>
+</file>
+
+<file path=ppt/notesMasters/notesMaster1.xml><?xml version="1.0" encoding="utf-8"?>
+<p:notesMaster xmlns:a="http://schemas.openxmlformats.org/drawingml/2006/main" xmlns:r="http://schemas.openxmlformats.org/officeDocument/2006/relationships" xmlns:p="http://schemas.openxmlformats.org/presentationml/2006/main">
+  <p:cSld>
+    <p:bg>
+      <p:bgRef idx="1001">
+        <a:schemeClr val="bg1"/>
+      </p:bgRef>
+    </p:bg>
+    <p:spTree>
+      <p:nvGrpSpPr>
+        <p:cNvPr id="1" name=""/>
+        <p:cNvGrpSpPr/>
+        <p:nvPr/>
+      </p:nvGrpSpPr>
+      <p:grpSpPr>
+        <a:xfrm>
+          <a:off x="0" y="0"/>
+          <a:ext cx="0" cy="0"/>
+          <a:chOff x="0" y="0"/>
+          <a:chExt cx="0" cy="0"/>
+        </a:xfrm>
+      </p:grpSpPr>
+      <p:sp>
+        <p:nvSpPr>
+          <p:cNvPr id="2" name="머리글 개체 틀 1"/>
+          <p:cNvSpPr>
+            <a:spLocks noGrp="1"/>
+          </p:cNvSpPr>
+          <p:nvPr>
+            <p:ph type="hdr" sz="quarter"/>
+          </p:nvPr>
+        </p:nvSpPr>
+        <p:spPr>
+          <a:xfrm>
+            <a:off x="0" y="0"/>
+            <a:ext cx="2971800" cy="458788"/>
+          </a:xfrm>
+          <a:prstGeom prst="rect">
+            <a:avLst/>
+          </a:prstGeom>
+        </p:spPr>
+        <p:txBody>
+          <a:bodyPr vert="horz" lIns="91440" tIns="45720" rIns="91440" bIns="45720" rtlCol="0"/>
+          <a:lstStyle>
+            <a:lvl1pPr algn="l">
+              <a:defRPr sz="1200"/>
+            </a:lvl1pPr>
+          </a:lstStyle>
+          <a:p>
+            <a:endParaRPr lang="ko-KR" altLang="en-US"/>
+          </a:p>
+        </p:txBody>
+      </p:sp>
+      <p:sp>
+        <p:nvSpPr>
+          <p:cNvPr id="3" name="날짜 개체 틀 2"/>
+          <p:cNvSpPr>
+            <a:spLocks noGrp="1"/>
+          </p:cNvSpPr>
+          <p:nvPr>
+            <p:ph type="dt" idx="1"/>
+          </p:nvPr>
+        </p:nvSpPr>
+        <p:spPr>
+          <a:xfrm>
+            <a:off x="3884613" y="0"/>
+            <a:ext cx="2971800" cy="458788"/>
+          </a:xfrm>
+          <a:prstGeom prst="rect">
+            <a:avLst/>
+          </a:prstGeom>
+        </p:spPr>
+        <p:txBody>
+          <a:bodyPr vert="horz" lIns="91440" tIns="45720" rIns="91440" bIns="45720" rtlCol="0"/>
+          <a:lstStyle>
+            <a:lvl1pPr algn="r">
+              <a:defRPr sz="1200"/>
+            </a:lvl1pPr>
+          </a:lstStyle>
+          <a:p>
+            <a:fld id="{F10F3234-0039-412B-A369-17F1B526B8CC}" type="datetimeFigureOut">
+              <a:rPr lang="ko-KR" altLang="en-US" smtClean="0"/>
+              <a:t>2025-11-12</a:t>
+            </a:fld>
+            <a:endParaRPr lang="ko-KR" altLang="en-US"/>
+          </a:p>
+        </p:txBody>
+      </p:sp>
+      <p:sp>
+        <p:nvSpPr>
+          <p:cNvPr id="4" name="슬라이드 이미지 개체 틀 3"/>
+          <p:cNvSpPr>
+            <a:spLocks noGrp="1" noRot="1" noChangeAspect="1"/>
+          </p:cNvSpPr>
+          <p:nvPr>
+            <p:ph type="sldImg" idx="2"/>
+          </p:nvPr>
+        </p:nvSpPr>
+        <p:spPr>
+          <a:xfrm>
+            <a:off x="685800" y="1143000"/>
+            <a:ext cx="5486400" cy="3086100"/>
+          </a:xfrm>
+          <a:prstGeom prst="rect">
+            <a:avLst/>
+          </a:prstGeom>
+          <a:noFill/>
+          <a:ln w="12700">
+            <a:solidFill>
+              <a:prstClr val="black"/>
+            </a:solidFill>
+          </a:ln>
+        </p:spPr>
+        <p:txBody>
+          <a:bodyPr vert="horz" lIns="91440" tIns="45720" rIns="91440" bIns="45720" rtlCol="0" anchor="ctr"/>
+          <a:lstStyle/>
+          <a:p>
+            <a:endParaRPr lang="ko-KR" altLang="en-US"/>
+          </a:p>
+        </p:txBody>
+      </p:sp>
+      <p:sp>
+        <p:nvSpPr>
+          <p:cNvPr id="5" name="슬라이드 노트 개체 틀 4"/>
+          <p:cNvSpPr>
+            <a:spLocks noGrp="1"/>
+          </p:cNvSpPr>
+          <p:nvPr>
+            <p:ph type="body" sz="quarter" idx="3"/>
+          </p:nvPr>
+        </p:nvSpPr>
+        <p:spPr>
+          <a:xfrm>
+            <a:off x="685800" y="4400550"/>
+            <a:ext cx="5486400" cy="3600450"/>
+          </a:xfrm>
+          <a:prstGeom prst="rect">
+            <a:avLst/>
+          </a:prstGeom>
+        </p:spPr>
+        <p:txBody>
+          <a:bodyPr vert="horz" lIns="91440" tIns="45720" rIns="91440" bIns="45720" rtlCol="0"/>
+          <a:lstStyle/>
+          <a:p>
+            <a:pPr lvl="0"/>
+            <a:r>
+              <a:rPr lang="ko-KR" altLang="en-US"/>
+              <a:t>마스터 텍스트 스타일을 편집하려면 클릭</a:t>
+            </a:r>
+          </a:p>
+          <a:p>
+            <a:pPr lvl="1"/>
+            <a:r>
+              <a:rPr lang="ko-KR" altLang="en-US"/>
+              <a:t>두 번째 수준</a:t>
+            </a:r>
+          </a:p>
+          <a:p>
+            <a:pPr lvl="2"/>
+            <a:r>
+              <a:rPr lang="ko-KR" altLang="en-US"/>
+              <a:t>세 번째 수준</a:t>
+            </a:r>
+          </a:p>
+          <a:p>
+            <a:pPr lvl="3"/>
+            <a:r>
+              <a:rPr lang="ko-KR" altLang="en-US"/>
+              <a:t>네 번째 수준</a:t>
+            </a:r>
+          </a:p>
+          <a:p>
+            <a:pPr lvl="4"/>
+            <a:r>
+              <a:rPr lang="ko-KR" altLang="en-US"/>
+              <a:t>다섯 번째 수준</a:t>
+            </a:r>
+          </a:p>
+        </p:txBody>
+      </p:sp>
+      <p:sp>
+        <p:nvSpPr>
+          <p:cNvPr id="6" name="바닥글 개체 틀 5"/>
+          <p:cNvSpPr>
+            <a:spLocks noGrp="1"/>
+          </p:cNvSpPr>
+          <p:nvPr>
+            <p:ph type="ftr" sz="quarter" idx="4"/>
+          </p:nvPr>
+        </p:nvSpPr>
+        <p:spPr>
+          <a:xfrm>
+            <a:off x="0" y="8685213"/>
+            <a:ext cx="2971800" cy="458787"/>
+          </a:xfrm>
+          <a:prstGeom prst="rect">
+            <a:avLst/>
+          </a:prstGeom>
+        </p:spPr>
+        <p:txBody>
+          <a:bodyPr vert="horz" lIns="91440" tIns="45720" rIns="91440" bIns="45720" rtlCol="0" anchor="b"/>
+          <a:lstStyle>
+            <a:lvl1pPr algn="l">
+              <a:defRPr sz="1200"/>
+            </a:lvl1pPr>
+          </a:lstStyle>
+          <a:p>
+            <a:endParaRPr lang="ko-KR" altLang="en-US"/>
+          </a:p>
+        </p:txBody>
+      </p:sp>
+      <p:sp>
+        <p:nvSpPr>
+          <p:cNvPr id="7" name="슬라이드 번호 개체 틀 6"/>
+          <p:cNvSpPr>
+            <a:spLocks noGrp="1"/>
+          </p:cNvSpPr>
+          <p:nvPr>
+            <p:ph type="sldNum" sz="quarter" idx="5"/>
+          </p:nvPr>
+        </p:nvSpPr>
+        <p:spPr>
+          <a:xfrm>
+            <a:off x="3884613" y="8685213"/>
+            <a:ext cx="2971800" cy="458787"/>
+          </a:xfrm>
+          <a:prstGeom prst="rect">
+            <a:avLst/>
+          </a:prstGeom>
+        </p:spPr>
+        <p:txBody>
+          <a:bodyPr vert="horz" lIns="91440" tIns="45720" rIns="91440" bIns="45720" rtlCol="0" anchor="b"/>
+          <a:lstStyle>
+            <a:lvl1pPr algn="r">
+              <a:defRPr sz="1200"/>
+            </a:lvl1pPr>
+          </a:lstStyle>
+          <a:p>
+            <a:fld id="{4D336FEE-20DA-43F4-B7CD-A678FA9E56FD}" type="slidenum">
+              <a:rPr lang="ko-KR" altLang="en-US" smtClean="0"/>
+              <a:t>‹#›</a:t>
+            </a:fld>
+            <a:endParaRPr lang="ko-KR" altLang="en-US"/>
+          </a:p>
+        </p:txBody>
+      </p:sp>
+    </p:spTree>
+    <p:extLst>
+      <p:ext uri="{BB962C8B-B14F-4D97-AF65-F5344CB8AC3E}">
+        <p14:creationId xmlns:p14="http://schemas.microsoft.com/office/powerpoint/2010/main" val="1742650913"/>
+      </p:ext>
+    </p:extLst>
+  </p:cSld>
+  <p:clrMap bg1="lt1" tx1="dk1" bg2="lt2" tx2="dk2" accent1="accent1" accent2="accent2" accent3="accent3" accent4="accent4" accent5="accent5" accent6="accent6" hlink="hlink" folHlink="folHlink"/>
+  <p:notesStyle>
+    <a:lvl1pPr marL="0" algn="l" defTabSz="914400" rtl="0" eaLnBrk="1" latinLnBrk="1" hangingPunct="1">
+      <a:defRPr sz="1200" kern="1200">
+        <a:solidFill>
+          <a:schemeClr val="tx1"/>
+        </a:solidFill>
+        <a:latin typeface="+mn-lt"/>
+        <a:ea typeface="+mn-ea"/>
+        <a:cs typeface="+mn-cs"/>
+      </a:defRPr>
+    </a:lvl1pPr>
+    <a:lvl2pPr marL="457200" algn="l" defTabSz="914400" rtl="0" eaLnBrk="1" latinLnBrk="1" hangingPunct="1">
+      <a:defRPr sz="1200" kern="1200">
+        <a:solidFill>
+          <a:schemeClr val="tx1"/>
+        </a:solidFill>
+        <a:latin typeface="+mn-lt"/>
+        <a:ea typeface="+mn-ea"/>
+        <a:cs typeface="+mn-cs"/>
+      </a:defRPr>
+    </a:lvl2pPr>
+    <a:lvl3pPr marL="914400" algn="l" defTabSz="914400" rtl="0" eaLnBrk="1" latinLnBrk="1" hangingPunct="1">
+      <a:defRPr sz="1200" kern="1200">
+        <a:solidFill>
+          <a:schemeClr val="tx1"/>
+        </a:solidFill>
+        <a:latin typeface="+mn-lt"/>
+        <a:ea typeface="+mn-ea"/>
+        <a:cs typeface="+mn-cs"/>
+      </a:defRPr>
+    </a:lvl3pPr>
+    <a:lvl4pPr marL="1371600" algn="l" defTabSz="914400" rtl="0" eaLnBrk="1" latinLnBrk="1" hangingPunct="1">
+      <a:defRPr sz="1200" kern="1200">
+        <a:solidFill>
+          <a:schemeClr val="tx1"/>
+        </a:solidFill>
+        <a:latin typeface="+mn-lt"/>
+        <a:ea typeface="+mn-ea"/>
+        <a:cs typeface="+mn-cs"/>
+      </a:defRPr>
+    </a:lvl4pPr>
+    <a:lvl5pPr marL="1828800" algn="l" defTabSz="914400" rtl="0" eaLnBrk="1" latinLnBrk="1" hangingPunct="1">
+      <a:defRPr sz="1200" kern="1200">
+        <a:solidFill>
+          <a:schemeClr val="tx1"/>
+        </a:solidFill>
+        <a:latin typeface="+mn-lt"/>
+        <a:ea typeface="+mn-ea"/>
+        <a:cs typeface="+mn-cs"/>
+      </a:defRPr>
+    </a:lvl5pPr>
+    <a:lvl6pPr marL="2286000" algn="l" defTabSz="914400" rtl="0" eaLnBrk="1" latinLnBrk="1" hangingPunct="1">
+      <a:defRPr sz="1200" kern="1200">
+        <a:solidFill>
+          <a:schemeClr val="tx1"/>
+        </a:solidFill>
+        <a:latin typeface="+mn-lt"/>
+        <a:ea typeface="+mn-ea"/>
+        <a:cs typeface="+mn-cs"/>
+      </a:defRPr>
+    </a:lvl6pPr>
+    <a:lvl7pPr marL="2743200" algn="l" defTabSz="914400" rtl="0" eaLnBrk="1" latinLnBrk="1" hangingPunct="1">
+      <a:defRPr sz="1200" kern="1200">
+        <a:solidFill>
+          <a:schemeClr val="tx1"/>
+        </a:solidFill>
+        <a:latin typeface="+mn-lt"/>
+        <a:ea typeface="+mn-ea"/>
+        <a:cs typeface="+mn-cs"/>
+      </a:defRPr>
+    </a:lvl7pPr>
+    <a:lvl8pPr marL="3200400" algn="l" defTabSz="914400" rtl="0" eaLnBrk="1" latinLnBrk="1" hangingPunct="1">
+      <a:defRPr sz="1200" kern="1200">
+        <a:solidFill>
+          <a:schemeClr val="tx1"/>
+        </a:solidFill>
+        <a:latin typeface="+mn-lt"/>
+        <a:ea typeface="+mn-ea"/>
+        <a:cs typeface="+mn-cs"/>
+      </a:defRPr>
+    </a:lvl8pPr>
+    <a:lvl9pPr marL="3657600" algn="l" defTabSz="914400" rtl="0" eaLnBrk="1" latinLnBrk="1" hangingPunct="1">
+      <a:defRPr sz="1200" kern="1200">
+        <a:solidFill>
+          <a:schemeClr val="tx1"/>
+        </a:solidFill>
+        <a:latin typeface="+mn-lt"/>
+        <a:ea typeface="+mn-ea"/>
+        <a:cs typeface="+mn-cs"/>
+      </a:defRPr>
+    </a:lvl9pPr>
+  </p:notesStyle>
+</p:notesMaster>
+</file>
+
+<file path=ppt/notesSlides/notesSlide1.xml><?xml version="1.0" encoding="utf-8"?>
+<p:notes xmlns:a="http://schemas.openxmlformats.org/drawingml/2006/main" xmlns:r="http://schemas.openxmlformats.org/officeDocument/2006/relationships" xmlns:p="http://schemas.openxmlformats.org/presentationml/2006/main">
+  <p:cSld>
+    <p:spTree>
+      <p:nvGrpSpPr>
+        <p:cNvPr id="1" name=""/>
+        <p:cNvGrpSpPr/>
+        <p:nvPr/>
+      </p:nvGrpSpPr>
+      <p:grpSpPr>
+        <a:xfrm>
+          <a:off x="0" y="0"/>
+          <a:ext cx="0" cy="0"/>
+          <a:chOff x="0" y="0"/>
+          <a:chExt cx="0" cy="0"/>
+        </a:xfrm>
+      </p:grpSpPr>
+      <p:sp>
+        <p:nvSpPr>
+          <p:cNvPr id="2" name="슬라이드 이미지 개체 틀 1"/>
+          <p:cNvSpPr>
+            <a:spLocks noGrp="1" noRot="1" noChangeAspect="1"/>
+          </p:cNvSpPr>
+          <p:nvPr>
+            <p:ph type="sldImg"/>
+          </p:nvPr>
+        </p:nvSpPr>
+        <p:spPr/>
+      </p:sp>
+      <p:sp>
+        <p:nvSpPr>
+          <p:cNvPr id="3" name="슬라이드 노트 개체 틀 2"/>
+          <p:cNvSpPr>
+            <a:spLocks noGrp="1"/>
+          </p:cNvSpPr>
+          <p:nvPr>
+            <p:ph type="body" idx="1"/>
+          </p:nvPr>
+        </p:nvSpPr>
+        <p:spPr/>
+        <p:txBody>
+          <a:bodyPr/>
+          <a:lstStyle/>
+          <a:p>
+            <a:endParaRPr lang="ko-KR" altLang="en-US" dirty="0"/>
+          </a:p>
+        </p:txBody>
+      </p:sp>
+      <p:sp>
+        <p:nvSpPr>
+          <p:cNvPr id="4" name="슬라이드 번호 개체 틀 3"/>
+          <p:cNvSpPr>
+            <a:spLocks noGrp="1"/>
+          </p:cNvSpPr>
+          <p:nvPr>
+            <p:ph type="sldNum" sz="quarter" idx="5"/>
+          </p:nvPr>
+        </p:nvSpPr>
+        <p:spPr/>
+        <p:txBody>
+          <a:bodyPr/>
+          <a:lstStyle/>
+          <a:p>
+            <a:fld id="{4D336FEE-20DA-43F4-B7CD-A678FA9E56FD}" type="slidenum">
+              <a:rPr lang="ko-KR" altLang="en-US" smtClean="0"/>
+              <a:t>4</a:t>
+            </a:fld>
+            <a:endParaRPr lang="ko-KR" altLang="en-US"/>
+          </a:p>
+        </p:txBody>
+      </p:sp>
+    </p:spTree>
+    <p:extLst>
+      <p:ext uri="{BB962C8B-B14F-4D97-AF65-F5344CB8AC3E}">
+        <p14:creationId xmlns:p14="http://schemas.microsoft.com/office/powerpoint/2010/main" val="3420410784"/>
+      </p:ext>
+    </p:extLst>
+  </p:cSld>
+  <p:clrMapOvr>
+    <a:masterClrMapping/>
+  </p:clrMapOvr>
+</p:notes>
+</file>
+
+<file path=ppt/notesSlides/notesSlide2.xml><?xml version="1.0" encoding="utf-8"?>
+<p:notes xmlns:a="http://schemas.openxmlformats.org/drawingml/2006/main" xmlns:r="http://schemas.openxmlformats.org/officeDocument/2006/relationships" xmlns:p="http://schemas.openxmlformats.org/presentationml/2006/main">
+  <p:cSld>
+    <p:spTree>
+      <p:nvGrpSpPr>
+        <p:cNvPr id="1" name="">
+          <a:extLst>
+            <a:ext uri="{FF2B5EF4-FFF2-40B4-BE49-F238E27FC236}">
+              <a16:creationId xmlns:a16="http://schemas.microsoft.com/office/drawing/2014/main" id="{8C82DADA-77BE-C0B5-2C00-80210DBAE3FF}"/>
+            </a:ext>
+          </a:extLst>
+        </p:cNvPr>
+        <p:cNvGrpSpPr/>
+        <p:nvPr/>
+      </p:nvGrpSpPr>
+      <p:grpSpPr>
+        <a:xfrm>
+          <a:off x="0" y="0"/>
+          <a:ext cx="0" cy="0"/>
+          <a:chOff x="0" y="0"/>
+          <a:chExt cx="0" cy="0"/>
+        </a:xfrm>
+      </p:grpSpPr>
+      <p:sp>
+        <p:nvSpPr>
+          <p:cNvPr id="2" name="슬라이드 이미지 개체 틀 1">
+            <a:extLst>
+              <a:ext uri="{FF2B5EF4-FFF2-40B4-BE49-F238E27FC236}">
+                <a16:creationId xmlns:a16="http://schemas.microsoft.com/office/drawing/2014/main" id="{69E34751-9AC6-1FEA-E6E1-2AA5B7DBDD69}"/>
+              </a:ext>
+            </a:extLst>
+          </p:cNvPr>
+          <p:cNvSpPr>
+            <a:spLocks noGrp="1" noRot="1" noChangeAspect="1"/>
+          </p:cNvSpPr>
+          <p:nvPr>
+            <p:ph type="sldImg"/>
+          </p:nvPr>
+        </p:nvSpPr>
+        <p:spPr/>
+      </p:sp>
+      <p:sp>
+        <p:nvSpPr>
+          <p:cNvPr id="3" name="슬라이드 노트 개체 틀 2">
+            <a:extLst>
+              <a:ext uri="{FF2B5EF4-FFF2-40B4-BE49-F238E27FC236}">
+                <a16:creationId xmlns:a16="http://schemas.microsoft.com/office/drawing/2014/main" id="{A7C3619D-B9F4-DF1B-6233-550B3AB9CB83}"/>
+              </a:ext>
+            </a:extLst>
+          </p:cNvPr>
+          <p:cNvSpPr>
+            <a:spLocks noGrp="1"/>
+          </p:cNvSpPr>
+          <p:nvPr>
+            <p:ph type="body" idx="1"/>
+          </p:nvPr>
+        </p:nvSpPr>
+        <p:spPr/>
+        <p:txBody>
+          <a:bodyPr/>
+          <a:lstStyle/>
+          <a:p>
+            <a:endParaRPr lang="ko-KR" altLang="en-US" dirty="0"/>
+          </a:p>
+        </p:txBody>
+      </p:sp>
+      <p:sp>
+        <p:nvSpPr>
+          <p:cNvPr id="4" name="슬라이드 번호 개체 틀 3">
+            <a:extLst>
+              <a:ext uri="{FF2B5EF4-FFF2-40B4-BE49-F238E27FC236}">
+                <a16:creationId xmlns:a16="http://schemas.microsoft.com/office/drawing/2014/main" id="{DE3864C1-AAC5-ADDD-4556-D8EF17EC13D1}"/>
+              </a:ext>
+            </a:extLst>
+          </p:cNvPr>
+          <p:cNvSpPr>
+            <a:spLocks noGrp="1"/>
+          </p:cNvSpPr>
+          <p:nvPr>
+            <p:ph type="sldNum" sz="quarter" idx="5"/>
+          </p:nvPr>
+        </p:nvSpPr>
+        <p:spPr/>
+        <p:txBody>
+          <a:bodyPr/>
+          <a:lstStyle/>
+          <a:p>
+            <a:fld id="{4D336FEE-20DA-43F4-B7CD-A678FA9E56FD}" type="slidenum">
+              <a:rPr lang="ko-KR" altLang="en-US" smtClean="0"/>
+              <a:t>5</a:t>
+            </a:fld>
+            <a:endParaRPr lang="ko-KR" altLang="en-US"/>
+          </a:p>
+        </p:txBody>
+      </p:sp>
+    </p:spTree>
+    <p:extLst>
+      <p:ext uri="{BB962C8B-B14F-4D97-AF65-F5344CB8AC3E}">
+        <p14:creationId xmlns:p14="http://schemas.microsoft.com/office/powerpoint/2010/main" val="3819040602"/>
+      </p:ext>
+    </p:extLst>
+  </p:cSld>
+  <p:clrMapOvr>
+    <a:masterClrMapping/>
+  </p:clrMapOvr>
+</p:notes>
 </file>
 
 <file path=ppt/slideLayouts/slideLayout1.xml><?xml version="1.0" encoding="utf-8"?>
@@ -7578,7 +8123,7 @@
           <p:nvPr>
             <p:extLst>
               <p:ext uri="{D42A27DB-BD31-4B8C-83A1-F6EECF244321}">
-                <p14:modId xmlns:p14="http://schemas.microsoft.com/office/powerpoint/2010/main" val="2106317249"/>
+                <p14:modId xmlns:p14="http://schemas.microsoft.com/office/powerpoint/2010/main" val="1697001096"/>
               </p:ext>
             </p:extLst>
           </p:nvPr>
@@ -8103,6 +8648,18 @@
                         </a:rPr>
                         <a:t>건담 캐릭터 추가</a:t>
                       </a:r>
+                      <a:r>
+                        <a:rPr lang="en-US" altLang="ko-KR" sz="1050" b="1" dirty="0">
+                          <a:latin typeface="+mn-lt"/>
+                        </a:rPr>
+                        <a:t>, </a:t>
+                      </a:r>
+                      <a:r>
+                        <a:rPr lang="ko-KR" altLang="en-US" sz="1050" b="1" dirty="0">
+                          <a:latin typeface="+mn-lt"/>
+                        </a:rPr>
+                        <a:t>라운드 시스템 구현</a:t>
+                      </a:r>
                     </a:p>
                   </a:txBody>
                   <a:tcPr anchor="ctr">
@@ -8189,163 +8746,6 @@
                     <a:lnT>
                       <a:noFill/>
                     </a:lnT>
-                    <a:lnTlToBr w="12700" cmpd="sng">
-                      <a:noFill/>
-                      <a:prstDash val="solid"/>
-                    </a:lnTlToBr>
-                    <a:lnBlToTr w="12700" cmpd="sng">
-                      <a:noFill/>
-                      <a:prstDash val="solid"/>
-                    </a:lnBlToTr>
-                  </a:tcPr>
-                </a:tc>
-                <a:tc>
-                  <a:txBody>
-                    <a:bodyPr/>
-                    <a:lstStyle/>
-                    <a:p>
-                      <a:pPr algn="ctr" latinLnBrk="1"/>
-                      <a:r>
-                        <a:rPr lang="ko-KR" altLang="en-US" sz="1050" b="1" dirty="0">
-                          <a:latin typeface="+mn-lt"/>
-                        </a:rPr>
-                        <a:t>계획</a:t>
-                      </a:r>
-                    </a:p>
-                  </a:txBody>
-                  <a:tcPr anchor="ctr">
-                    <a:lnL w="12700" cap="flat" cmpd="sng" algn="ctr">
-                      <a:solidFill>
-                        <a:schemeClr val="tx1"/>
-                      </a:solidFill>
-                      <a:prstDash val="solid"/>
-                      <a:round/>
-                      <a:headEnd type="none" w="med" len="med"/>
-                      <a:tailEnd type="none" w="med" len="med"/>
-                    </a:lnL>
-                    <a:lnR w="12700" cap="flat" cmpd="sng" algn="ctr">
-                      <a:solidFill>
-                        <a:schemeClr val="tx1"/>
-                      </a:solidFill>
-                      <a:prstDash val="solid"/>
-                      <a:round/>
-                      <a:headEnd type="none" w="med" len="med"/>
-                      <a:tailEnd type="none" w="med" len="med"/>
-                    </a:lnR>
-                    <a:lnT>
-                      <a:noFill/>
-                    </a:lnT>
-                    <a:lnB>
-                      <a:noFill/>
-                    </a:lnB>
-                    <a:lnTlToBr w="12700" cmpd="sng">
-                      <a:noFill/>
-                      <a:prstDash val="solid"/>
-                    </a:lnTlToBr>
-                    <a:lnBlToTr w="12700" cmpd="sng">
-                      <a:noFill/>
-                      <a:prstDash val="solid"/>
-                    </a:lnBlToTr>
-                  </a:tcPr>
-                </a:tc>
-                <a:tc>
-                  <a:txBody>
-                    <a:bodyPr/>
-                    <a:lstStyle/>
-                    <a:p>
-                      <a:pPr latinLnBrk="1"/>
-                      <a:r>
-                        <a:rPr lang="ko-KR" altLang="en-US" sz="1050" b="1" dirty="0">
-                          <a:latin typeface="+mn-lt"/>
-                        </a:rPr>
-                        <a:t>커맨드 기술 추가</a:t>
-                      </a:r>
-                    </a:p>
-                  </a:txBody>
-                  <a:tcPr anchor="ctr">
-                    <a:lnL w="12700" cap="flat" cmpd="sng" algn="ctr">
-                      <a:solidFill>
-                        <a:schemeClr val="tx1"/>
-                      </a:solidFill>
-                      <a:prstDash val="solid"/>
-                      <a:round/>
-                      <a:headEnd type="none" w="med" len="med"/>
-                      <a:tailEnd type="none" w="med" len="med"/>
-                    </a:lnL>
-                    <a:lnR w="12700" cap="flat" cmpd="sng" algn="ctr">
-                      <a:solidFill>
-                        <a:schemeClr val="tx1"/>
-                      </a:solidFill>
-                      <a:prstDash val="solid"/>
-                      <a:round/>
-                      <a:headEnd type="none" w="med" len="med"/>
-                      <a:tailEnd type="none" w="med" len="med"/>
-                    </a:lnR>
-                    <a:lnT>
-                      <a:noFill/>
-                    </a:lnT>
-                    <a:lnB>
-                      <a:noFill/>
-                    </a:lnB>
-                    <a:lnTlToBr w="12700" cmpd="sng">
-                      <a:noFill/>
-                      <a:prstDash val="solid"/>
-                    </a:lnTlToBr>
-                    <a:lnBlToTr w="12700" cmpd="sng">
-                      <a:noFill/>
-                      <a:prstDash val="solid"/>
-                    </a:lnBlToTr>
-                  </a:tcPr>
-                </a:tc>
-                <a:extLst>
-                  <a:ext uri="{0D108BD9-81ED-4DB2-BD59-A6C34878D82A}">
-                    <a16:rowId xmlns:a16="http://schemas.microsoft.com/office/drawing/2014/main" val="2616805717"/>
-                  </a:ext>
-                </a:extLst>
-              </a:tr>
-              <a:tr h="191318">
-                <a:tc>
-                  <a:txBody>
-                    <a:bodyPr/>
-                    <a:lstStyle/>
-                    <a:p>
-                      <a:pPr algn="ctr" latinLnBrk="1"/>
-                      <a:r>
-                        <a:rPr lang="en-US" altLang="ko-KR" sz="1800" b="1" dirty="0">
-                          <a:latin typeface="+mn-lt"/>
-                        </a:rPr>
-                        <a:t>8~9</a:t>
-                      </a:r>
-                      <a:r>
-                        <a:rPr lang="ko-KR" altLang="en-US" sz="1800" b="1" dirty="0">
-                          <a:latin typeface="+mn-lt"/>
-                        </a:rPr>
-                        <a:t>주</a:t>
-                      </a:r>
-                    </a:p>
-                  </a:txBody>
-                  <a:tcPr anchor="ctr">
-                    <a:lnL w="12700" cap="flat" cmpd="sng" algn="ctr">
-                      <a:solidFill>
-                        <a:schemeClr val="tx1"/>
-                      </a:solidFill>
-                      <a:prstDash val="solid"/>
-                      <a:round/>
-                      <a:headEnd type="none" w="med" len="med"/>
-                      <a:tailEnd type="none" w="med" len="med"/>
-                    </a:lnL>
-                    <a:lnR w="12700" cap="flat" cmpd="sng" algn="ctr">
-                      <a:solidFill>
-                        <a:schemeClr val="tx1"/>
-                      </a:solidFill>
-                      <a:prstDash val="solid"/>
-                      <a:round/>
-                      <a:headEnd type="none" w="med" len="med"/>
-                      <a:tailEnd type="none" w="med" len="med"/>
-                    </a:lnR>
-                    <a:lnB>
-                      <a:noFill/>
-                    </a:lnB>
                     <a:lnTlToBr w="12700" cmpd="sng">
                       <a:noFill/>
                       <a:prstDash val="solid"/>
@@ -8428,6 +8828,179 @@
                         <a:defRPr/>
                       </a:pPr>
                       <a:r>
+                        <a:rPr lang="ko-KR" altLang="en-US" sz="1050" b="1" dirty="0">
+                          <a:latin typeface="+mn-lt"/>
+                        </a:rPr>
+                        <a:t>커맨드 기술 추가</a:t>
+                      </a:r>
+                    </a:p>
+                  </a:txBody>
+                  <a:tcPr anchor="ctr">
+                    <a:lnL w="12700" cap="flat" cmpd="sng" algn="ctr">
+                      <a:solidFill>
+                        <a:schemeClr val="tx1"/>
+                      </a:solidFill>
+                      <a:prstDash val="solid"/>
+                      <a:round/>
+                      <a:headEnd type="none" w="med" len="med"/>
+                      <a:tailEnd type="none" w="med" len="med"/>
+                    </a:lnL>
+                    <a:lnR w="12700" cap="flat" cmpd="sng" algn="ctr">
+                      <a:solidFill>
+                        <a:schemeClr val="tx1"/>
+                      </a:solidFill>
+                      <a:prstDash val="solid"/>
+                      <a:round/>
+                      <a:headEnd type="none" w="med" len="med"/>
+                      <a:tailEnd type="none" w="med" len="med"/>
+                    </a:lnR>
+                    <a:lnT>
+                      <a:noFill/>
+                    </a:lnT>
+                    <a:lnB>
+                      <a:noFill/>
+                    </a:lnB>
+                    <a:lnTlToBr w="12700" cmpd="sng">
+                      <a:noFill/>
+                      <a:prstDash val="solid"/>
+                    </a:lnTlToBr>
+                    <a:lnBlToTr w="12700" cmpd="sng">
+                      <a:noFill/>
+                      <a:prstDash val="solid"/>
+                    </a:lnBlToTr>
+                  </a:tcPr>
+                </a:tc>
+                <a:extLst>
+                  <a:ext uri="{0D108BD9-81ED-4DB2-BD59-A6C34878D82A}">
+                    <a16:rowId xmlns:a16="http://schemas.microsoft.com/office/drawing/2014/main" val="2616805717"/>
+                  </a:ext>
+                </a:extLst>
+              </a:tr>
+              <a:tr h="191318">
+                <a:tc>
+                  <a:txBody>
+                    <a:bodyPr/>
+                    <a:lstStyle/>
+                    <a:p>
+                      <a:pPr algn="ctr" latinLnBrk="1"/>
+                      <a:r>
+                        <a:rPr lang="en-US" altLang="ko-KR" sz="1800" b="1" dirty="0">
+                          <a:latin typeface="+mn-lt"/>
+                        </a:rPr>
+                        <a:t>8</a:t>
+                      </a:r>
+                      <a:r>
+                        <a:rPr lang="ko-KR" altLang="en-US" sz="1800" b="1" dirty="0">
+                          <a:latin typeface="+mn-lt"/>
+                        </a:rPr>
+                        <a:t>주</a:t>
+                      </a:r>
+                    </a:p>
+                  </a:txBody>
+                  <a:tcPr anchor="ctr">
+                    <a:lnL w="12700" cap="flat" cmpd="sng" algn="ctr">
+                      <a:solidFill>
+                        <a:schemeClr val="tx1"/>
+                      </a:solidFill>
+                      <a:prstDash val="solid"/>
+                      <a:round/>
+                      <a:headEnd type="none" w="med" len="med"/>
+                      <a:tailEnd type="none" w="med" len="med"/>
+                    </a:lnL>
+                    <a:lnR w="12700" cap="flat" cmpd="sng" algn="ctr">
+                      <a:solidFill>
+                        <a:schemeClr val="tx1"/>
+                      </a:solidFill>
+                      <a:prstDash val="solid"/>
+                      <a:round/>
+                      <a:headEnd type="none" w="med" len="med"/>
+                      <a:tailEnd type="none" w="med" len="med"/>
+                    </a:lnR>
+                    <a:lnB>
+                      <a:noFill/>
+                    </a:lnB>
+                    <a:lnTlToBr w="12700" cmpd="sng">
+                      <a:noFill/>
+                      <a:prstDash val="solid"/>
+                    </a:lnTlToBr>
+                    <a:lnBlToTr w="12700" cmpd="sng">
+                      <a:noFill/>
+                      <a:prstDash val="solid"/>
+                    </a:lnBlToTr>
+                  </a:tcPr>
+                </a:tc>
+                <a:tc>
+                  <a:txBody>
+                    <a:bodyPr/>
+                    <a:lstStyle/>
+                    <a:p>
+                      <a:pPr algn="ctr" latinLnBrk="1"/>
+                      <a:r>
+                        <a:rPr lang="ko-KR" altLang="en-US" sz="1050" b="1" dirty="0">
+                          <a:latin typeface="+mn-lt"/>
+                        </a:rPr>
+                        <a:t>계획</a:t>
+                      </a:r>
+                    </a:p>
+                  </a:txBody>
+                  <a:tcPr anchor="ctr">
+                    <a:lnL w="12700" cap="flat" cmpd="sng" algn="ctr">
+                      <a:solidFill>
+                        <a:schemeClr val="tx1"/>
+                      </a:solidFill>
+                      <a:prstDash val="solid"/>
+                      <a:round/>
+                      <a:headEnd type="none" w="med" len="med"/>
+                      <a:tailEnd type="none" w="med" len="med"/>
+                    </a:lnL>
+                    <a:lnR w="12700" cap="flat" cmpd="sng" algn="ctr">
+                      <a:solidFill>
+                        <a:schemeClr val="tx1"/>
+                      </a:solidFill>
+                      <a:prstDash val="solid"/>
+                      <a:round/>
+                      <a:headEnd type="none" w="med" len="med"/>
+                      <a:tailEnd type="none" w="med" len="med"/>
+                    </a:lnR>
+                    <a:lnT>
+                      <a:noFill/>
+                    </a:lnT>
+                    <a:lnB>
+                      <a:noFill/>
+                    </a:lnB>
+                    <a:lnTlToBr w="12700" cmpd="sng">
+                      <a:noFill/>
+                      <a:prstDash val="solid"/>
+                    </a:lnTlToBr>
+                    <a:lnBlToTr w="12700" cmpd="sng">
+                      <a:noFill/>
+                      <a:prstDash val="solid"/>
+                    </a:lnBlToTr>
+                  </a:tcPr>
+                </a:tc>
+                <a:tc>
+                  <a:txBody>
+                    <a:bodyPr/>
+                    <a:lstStyle/>
+                    <a:p>
+                      <a:pPr marL="0" marR="0" lvl="0" indent="0" algn="l" defTabSz="914400" rtl="0" eaLnBrk="1" fontAlgn="auto" latinLnBrk="1" hangingPunct="1">
+                        <a:lnSpc>
+                          <a:spcPct val="100000"/>
+                        </a:lnSpc>
+                        <a:spcBef>
+                          <a:spcPts val="0"/>
+                        </a:spcBef>
+                        <a:spcAft>
+                          <a:spcPts val="0"/>
+                        </a:spcAft>
+                        <a:buClrTx/>
+                        <a:buSzTx/>
+                        <a:buFontTx/>
+                        <a:buNone/>
+                        <a:tabLst/>
+                        <a:defRPr/>
+                      </a:pPr>
+                      <a:r>
                         <a:rPr lang="en-US" altLang="ko-KR" sz="1050" b="1" dirty="0">
                           <a:latin typeface="+mn-lt"/>
                         </a:rPr>
@@ -8493,7 +9066,7 @@
                         <a:rPr lang="en-US" altLang="ko-KR" sz="1600" b="1" dirty="0">
                           <a:latin typeface="+mn-lt"/>
                         </a:rPr>
-                        <a:t>10</a:t>
+                        <a:t>9</a:t>
                       </a:r>
                       <a:r>
                         <a:rPr lang="ko-KR" altLang="en-US" sz="1600" b="1" dirty="0">
@@ -8604,7 +9177,23 @@
                     <a:bodyPr/>
                     <a:lstStyle/>
                     <a:p>
-                      <a:pPr latinLnBrk="1"/>
+                      <a:pPr marL="0" marR="0" lvl="0" indent="0" algn="l" defTabSz="914400" rtl="0" eaLnBrk="1" fontAlgn="auto" latinLnBrk="1" hangingPunct="1">
+                        <a:lnSpc>
+                          <a:spcPct val="100000"/>
+                        </a:lnSpc>
+                        <a:spcBef>
+                          <a:spcPts val="0"/>
+                        </a:spcBef>
+                        <a:spcAft>
+                          <a:spcPts val="0"/>
+                        </a:spcAft>
+                        <a:buClrTx/>
+                        <a:buSzTx/>
+                        <a:buFontTx/>
+                        <a:buNone/>
+                        <a:tabLst/>
+                        <a:defRPr/>
+                      </a:pPr>
                       <a:r>
                         <a:rPr lang="ko-KR" altLang="en-US" sz="1050" b="1" dirty="0">
                           <a:latin typeface="+mn-lt"/>
@@ -8760,7 +9349,7 @@
           <p:nvPr/>
         </p:nvPicPr>
         <p:blipFill>
-          <a:blip r:embed="rId2">
+          <a:blip r:embed="rId3">
             <a:extLst>
               <a:ext uri="{28A0092B-C50C-407E-A947-70E740481C1C}">
                 <a14:useLocalDpi xmlns:a14="http://schemas.microsoft.com/office/drawing/2010/main" val="0"/>
@@ -8785,6 +9374,119 @@
     <p:extLst>
       <p:ext uri="{BB962C8B-B14F-4D97-AF65-F5344CB8AC3E}">
         <p14:creationId xmlns:p14="http://schemas.microsoft.com/office/powerpoint/2010/main" val="2562493133"/>
+      </p:ext>
+    </p:extLst>
+  </p:cSld>
+  <p:clrMapOvr>
+    <a:masterClrMapping/>
+  </p:clrMapOvr>
+</p:sld>
+</file>
+
+<file path=ppt/slides/slide5.xml><?xml version="1.0" encoding="utf-8"?>
+<p:sld xmlns:a="http://schemas.openxmlformats.org/drawingml/2006/main" xmlns:r="http://schemas.openxmlformats.org/officeDocument/2006/relationships" xmlns:p="http://schemas.openxmlformats.org/presentationml/2006/main">
+  <p:cSld>
+    <p:spTree>
+      <p:nvGrpSpPr>
+        <p:cNvPr id="1" name="">
+          <a:extLst>
+            <a:ext uri="{FF2B5EF4-FFF2-40B4-BE49-F238E27FC236}">
+              <a16:creationId xmlns:a16="http://schemas.microsoft.com/office/drawing/2014/main" id="{1821A52B-E97D-AD35-D796-8F467D697806}"/>
+            </a:ext>
+          </a:extLst>
+        </p:cNvPr>
+        <p:cNvGrpSpPr/>
+        <p:nvPr/>
+      </p:nvGrpSpPr>
+      <p:grpSpPr>
+        <a:xfrm>
+          <a:off x="0" y="0"/>
+          <a:ext cx="0" cy="0"/>
+          <a:chOff x="0" y="0"/>
+          <a:chExt cx="0" cy="0"/>
+        </a:xfrm>
+      </p:grpSpPr>
+      <p:sp>
+        <p:nvSpPr>
+          <p:cNvPr id="2" name="제목 1">
+            <a:extLst>
+              <a:ext uri="{FF2B5EF4-FFF2-40B4-BE49-F238E27FC236}">
+                <a16:creationId xmlns:a16="http://schemas.microsoft.com/office/drawing/2014/main" id="{1A9EC4B9-C32F-FF9E-ED99-FEB483B9BC02}"/>
+              </a:ext>
+            </a:extLst>
+          </p:cNvPr>
+          <p:cNvSpPr>
+            <a:spLocks noGrp="1"/>
+          </p:cNvSpPr>
+          <p:nvPr>
+            <p:ph type="title"/>
+          </p:nvPr>
+        </p:nvSpPr>
+        <p:spPr>
+          <a:xfrm>
+            <a:off x="514350" y="0"/>
+            <a:ext cx="10515600" cy="1325563"/>
+          </a:xfrm>
+        </p:spPr>
+        <p:txBody>
+          <a:bodyPr/>
+          <a:lstStyle/>
+          <a:p>
+            <a:r>
+              <a:rPr lang="en-US" altLang="ko-KR" dirty="0"/>
+              <a:t>Unity Version Control </a:t>
+            </a:r>
+            <a:r>
+              <a:rPr lang="ko-KR" altLang="en-US" dirty="0" err="1"/>
+              <a:t>커밋</a:t>
+            </a:r>
+            <a:r>
+              <a:rPr lang="ko-KR" altLang="en-US" dirty="0"/>
+              <a:t> 목록</a:t>
+            </a:r>
+          </a:p>
+        </p:txBody>
+      </p:sp>
+      <p:pic>
+        <p:nvPicPr>
+          <p:cNvPr id="4" name="그림 3" descr="텍스트, 스크린샷, 번호, 소프트웨어이(가) 표시된 사진&#10;&#10;AI 생성 콘텐츠는 정확하지 않을 수 있습니다.">
+            <a:extLst>
+              <a:ext uri="{FF2B5EF4-FFF2-40B4-BE49-F238E27FC236}">
+                <a16:creationId xmlns:a16="http://schemas.microsoft.com/office/drawing/2014/main" id="{4249B81F-3929-B558-67DA-CDA754788AE5}"/>
+              </a:ext>
+            </a:extLst>
+          </p:cNvPr>
+          <p:cNvPicPr>
+            <a:picLocks noChangeAspect="1"/>
+          </p:cNvPicPr>
+          <p:nvPr/>
+        </p:nvPicPr>
+        <p:blipFill>
+          <a:blip r:embed="rId3">
+            <a:extLst>
+              <a:ext uri="{28A0092B-C50C-407E-A947-70E740481C1C}">
+                <a14:useLocalDpi xmlns:a14="http://schemas.microsoft.com/office/drawing/2010/main" val="0"/>
+              </a:ext>
+            </a:extLst>
+          </a:blip>
+          <a:stretch>
+            <a:fillRect/>
+          </a:stretch>
+        </p:blipFill>
+        <p:spPr>
+          <a:xfrm>
+            <a:off x="2267895" y="1371380"/>
+            <a:ext cx="7003106" cy="5118320"/>
+          </a:xfrm>
+          <a:prstGeom prst="rect">
+            <a:avLst/>
+          </a:prstGeom>
+        </p:spPr>
+      </p:pic>
+    </p:spTree>
+    <p:extLst>
+      <p:ext uri="{BB962C8B-B14F-4D97-AF65-F5344CB8AC3E}">
+        <p14:creationId xmlns:p14="http://schemas.microsoft.com/office/powerpoint/2010/main" val="3303721201"/>
       </p:ext>
     </p:extLst>
   </p:cSld>
@@ -9107,4 +9809,319 @@
     </a:ext>
   </a:extLst>
 </a:theme>
+</file>
+
+<file path=ppt/theme/theme2.xml><?xml version="1.0" encoding="utf-8"?>
+<a:theme xmlns:a="http://schemas.openxmlformats.org/drawingml/2006/main" name="Office 테마">
+  <a:themeElements>
+    <a:clrScheme name="Office">
+      <a:dk1>
+        <a:sysClr val="windowText" lastClr="000000"/>
+      </a:dk1>
+      <a:lt1>
+        <a:sysClr val="window" lastClr="FFFFFF"/>
+      </a:lt1>
+      <a:dk2>
+        <a:srgbClr val="0E2841"/>
+      </a:dk2>
+      <a:lt2>
+        <a:srgbClr val="E8E8E8"/>
+      </a:lt2>
+      <a:accent1>
+        <a:srgbClr val="156082"/>
+      </a:accent1>
+      <a:accent2>
+        <a:srgbClr val="E97132"/>
+      </a:accent2>
+      <a:accent3>
+        <a:srgbClr val="196B24"/>
+      </a:accent3>
+      <a:accent4>
+        <a:srgbClr val="0F9ED5"/>
+      </a:accent4>
+      <a:accent5>
+        <a:srgbClr val="A02B93"/>
+      </a:accent5>
+      <a:accent6>
+        <a:srgbClr val="4EA72E"/>
+      </a:accent6>
+      <a:hlink>
+        <a:srgbClr val="467886"/>
+      </a:hlink>
+      <a:folHlink>
+        <a:srgbClr val="96607D"/>
+      </a:folHlink>
+    </a:clrScheme>
+    <a:fontScheme name="Office">
+      <a:majorFont>
+        <a:latin typeface="맑은 고딕" panose="02110004020202020204"/>
+        <a:ea typeface=""/>
+        <a:cs typeface=""/>
+        <a:font script="Jpan" typeface="游ゴシック Light"/>
+        <a:font script="Hang" typeface="맑은 고딕"/>
+        <a:font script="Hans" typeface="等线 Light"/>
+        <a:font script="Hant" typeface="新細明體"/>
+        <a:font script="Arab" typeface="Times New Roman"/>
+        <a:font script="Hebr" typeface="Times New Roman"/>
+        <a:font script="Thai" typeface="Angsana New"/>
+        <a:font script="Ethi" typeface="Nyala"/>
+        <a:font script="Beng" typeface="Vrinda"/>
+        <a:font script="Gujr" typeface="Shruti"/>
+        <a:font script="Khmr" typeface="MoolBoran"/>
+        <a:font script="Knda" typeface="Tunga"/>
+        <a:font script="Guru" typeface="Raavi"/>
+        <a:font script="Cans" typeface="Euphemia"/>
+        <a:font script="Cher" typeface="Plantagenet Cherokee"/>
+        <a:font script="Yiii" typeface="Microsoft Yi Baiti"/>
+        <a:font script="Tibt" typeface="Microsoft Himalaya"/>
+        <a:font script="Thaa" typeface="MV Boli"/>
+        <a:font script="Deva" typeface="Mangal"/>
+        <a:font script="Telu" typeface="Gautami"/>
+        <a:font script="Taml" typeface="Latha"/>
+        <a:font script="Syrc" typeface="Estrangelo Edessa"/>
+        <a:font script="Orya" typeface="Kalinga"/>
+        <a:font script="Mlym" typeface="Kartika"/>
+        <a:font script="Laoo" typeface="DokChampa"/>
+        <a:font script="Sinh" typeface="Iskoola Pota"/>
+        <a:font script="Mong" typeface="Mongolian Baiti"/>
+        <a:font script="Viet" typeface="Times New Roman"/>
+        <a:font script="Uigh" typeface="Microsoft Uighur"/>
+        <a:font script="Geor" typeface="Sylfaen"/>
+        <a:font script="Armn" typeface="Arial"/>
+        <a:font script="Bugi" typeface="Leelawadee UI"/>
+        <a:font script="Bopo" typeface="Microsoft JhengHei"/>
+        <a:font script="Java" typeface="Javanese Text"/>
+        <a:font script="Lisu" typeface="Segoe UI"/>
+        <a:font script="Mymr" typeface="Myanmar Text"/>
+        <a:font script="Nkoo" typeface="Ebrima"/>
+        <a:font script="Olck" typeface="Nirmala UI"/>
+        <a:font script="Osma" typeface="Ebrima"/>
+        <a:font script="Phag" typeface="Phagspa"/>
+        <a:font script="Syrn" typeface="Estrangelo Edessa"/>
+        <a:font script="Syrj" typeface="Estrangelo Edessa"/>
+        <a:font script="Syre" typeface="Estrangelo Edessa"/>
+        <a:font script="Sora" typeface="Nirmala UI"/>
+        <a:font script="Tale" typeface="Microsoft Tai Le"/>
+        <a:font script="Talu" typeface="Microsoft New Tai Lue"/>
+        <a:font script="Tfng" typeface="Ebrima"/>
+      </a:majorFont>
+      <a:minorFont>
+        <a:latin typeface="맑은 고딕" panose="02110004020202020204"/>
+        <a:ea typeface=""/>
+        <a:cs typeface=""/>
+        <a:font script="Jpan" typeface="游ゴシック"/>
+        <a:font script="Hang" typeface="맑은 고딕"/>
+        <a:font script="Hans" typeface="等线"/>
+        <a:font script="Hant" typeface="新細明體"/>
+        <a:font script="Arab" typeface="Arial"/>
+        <a:font script="Hebr" typeface="Arial"/>
+        <a:font script="Thai" typeface="Cordia New"/>
+        <a:font script="Ethi" typeface="Nyala"/>
+        <a:font script="Beng" typeface="Vrinda"/>
+        <a:font script="Gujr" typeface="Shruti"/>
+        <a:font script="Khmr" typeface="DaunPenh"/>
+        <a:font script="Knda" typeface="Tunga"/>
+        <a:font script="Guru" typeface="Raavi"/>
+        <a:font script="Cans" typeface="Euphemia"/>
+        <a:font script="Cher" typeface="Plantagenet Cherokee"/>
+        <a:font script="Yiii" typeface="Microsoft Yi Baiti"/>
+        <a:font script="Tibt" typeface="Microsoft Himalaya"/>
+        <a:font script="Thaa" typeface="MV Boli"/>
+        <a:font script="Deva" typeface="Mangal"/>
+        <a:font script="Telu" typeface="Gautami"/>
+        <a:font script="Taml" typeface="Latha"/>
+        <a:font script="Syrc" typeface="Estrangelo Edessa"/>
+        <a:font script="Orya" typeface="Kalinga"/>
+        <a:font script="Mlym" typeface="Kartika"/>
+        <a:font script="Laoo" typeface="DokChampa"/>
+        <a:font script="Sinh" typeface="Iskoola Pota"/>
+        <a:font script="Mong" typeface="Mongolian Baiti"/>
+        <a:font script="Viet" typeface="Arial"/>
+        <a:font script="Uigh" typeface="Microsoft Uighur"/>
+        <a:font script="Geor" typeface="Sylfaen"/>
+        <a:font script="Armn" typeface="Arial"/>
+        <a:font script="Bugi" typeface="Leelawadee UI"/>
+        <a:font script="Bopo" typeface="Microsoft JhengHei"/>
+        <a:font script="Java" typeface="Javanese Text"/>
+        <a:font script="Lisu" typeface="Segoe UI"/>
+        <a:font script="Mymr" typeface="Myanmar Text"/>
+        <a:font script="Nkoo" typeface="Ebrima"/>
+        <a:font script="Olck" typeface="Nirmala UI"/>
+        <a:font script="Osma" typeface="Ebrima"/>
+        <a:font script="Phag" typeface="Phagspa"/>
+        <a:font script="Syrn" typeface="Estrangelo Edessa"/>
+        <a:font script="Syrj" typeface="Estrangelo Edessa"/>
+        <a:font script="Syre" typeface="Estrangelo Edessa"/>
+        <a:font script="Sora" typeface="Nirmala UI"/>
+        <a:font script="Tale" typeface="Microsoft Tai Le"/>
+        <a:font script="Talu" typeface="Microsoft New Tai Lue"/>
+        <a:font script="Tfng" typeface="Ebrima"/>
+      </a:minorFont>
+    </a:fontScheme>
+    <a:fmtScheme name="Office">
+      <a:fillStyleLst>
+        <a:solidFill>
+          <a:schemeClr val="phClr"/>
+        </a:solidFill>
+        <a:gradFill rotWithShape="1">
+          <a:gsLst>
+            <a:gs pos="0">
+              <a:schemeClr val="phClr">
+                <a:lumMod val="110000"/>
+                <a:satMod val="105000"/>
+                <a:tint val="67000"/>
+              </a:schemeClr>
+            </a:gs>
+            <a:gs pos="50000">
+              <a:schemeClr val="phClr">
+                <a:lumMod val="105000"/>
+                <a:satMod val="103000"/>
+                <a:tint val="73000"/>
+              </a:schemeClr>
+            </a:gs>
+            <a:gs pos="100000">
+              <a:schemeClr val="phClr">
+                <a:lumMod val="105000"/>
+                <a:satMod val="109000"/>
+                <a:tint val="81000"/>
+              </a:schemeClr>
+            </a:gs>
+          </a:gsLst>
+          <a:lin ang="5400000" scaled="0"/>
+        </a:gradFill>
+        <a:gradFill rotWithShape="1">
+          <a:gsLst>
+            <a:gs pos="0">
+              <a:schemeClr val="phClr">
+                <a:satMod val="103000"/>
+                <a:lumMod val="102000"/>
+                <a:tint val="94000"/>
+              </a:schemeClr>
+            </a:gs>
+            <a:gs pos="50000">
+              <a:schemeClr val="phClr">
+                <a:satMod val="110000"/>
+                <a:lumMod val="100000"/>
+                <a:shade val="100000"/>
+              </a:schemeClr>
+            </a:gs>
+            <a:gs pos="100000">
+              <a:schemeClr val="phClr">
+                <a:lumMod val="99000"/>
+                <a:satMod val="120000"/>
+                <a:shade val="78000"/>
+              </a:schemeClr>
+            </a:gs>
+          </a:gsLst>
+          <a:lin ang="5400000" scaled="0"/>
+        </a:gradFill>
+      </a:fillStyleLst>
+      <a:lnStyleLst>
+        <a:ln w="12700" cap="flat" cmpd="sng" algn="ctr">
+          <a:solidFill>
+            <a:schemeClr val="phClr"/>
+          </a:solidFill>
+          <a:prstDash val="solid"/>
+          <a:miter lim="800000"/>
+        </a:ln>
+        <a:ln w="19050" cap="flat" cmpd="sng" algn="ctr">
+          <a:solidFill>
+            <a:schemeClr val="phClr"/>
+          </a:solidFill>
+          <a:prstDash val="solid"/>
+          <a:miter lim="800000"/>
+        </a:ln>
+        <a:ln w="25400" cap="flat" cmpd="sng" algn="ctr">
+          <a:solidFill>
+            <a:schemeClr val="phClr"/>
+          </a:solidFill>
+          <a:prstDash val="solid"/>
+          <a:miter lim="800000"/>
+        </a:ln>
+      </a:lnStyleLst>
+      <a:effectStyleLst>
+        <a:effectStyle>
+          <a:effectLst/>
+        </a:effectStyle>
+        <a:effectStyle>
+          <a:effectLst/>
+        </a:effectStyle>
+        <a:effectStyle>
+          <a:effectLst>
+            <a:outerShdw blurRad="57150" dist="19050" dir="5400000" algn="ctr" rotWithShape="0">
+              <a:srgbClr val="000000">
+                <a:alpha val="63000"/>
+              </a:srgbClr>
+            </a:outerShdw>
+          </a:effectLst>
+        </a:effectStyle>
+      </a:effectStyleLst>
+      <a:bgFillStyleLst>
+        <a:solidFill>
+          <a:schemeClr val="phClr"/>
+        </a:solidFill>
+        <a:solidFill>
+          <a:schemeClr val="phClr">
+            <a:tint val="95000"/>
+            <a:satMod val="170000"/>
+          </a:schemeClr>
+        </a:solidFill>
+        <a:gradFill rotWithShape="1">
+          <a:gsLst>
+            <a:gs pos="0">
+              <a:schemeClr val="phClr">
+                <a:tint val="93000"/>
+                <a:satMod val="150000"/>
+                <a:shade val="98000"/>
+                <a:lumMod val="102000"/>
+              </a:schemeClr>
+            </a:gs>
+            <a:gs pos="50000">
+              <a:schemeClr val="phClr">
+                <a:tint val="98000"/>
+                <a:satMod val="130000"/>
+                <a:shade val="90000"/>
+                <a:lumMod val="103000"/>
+              </a:schemeClr>
+            </a:gs>
+            <a:gs pos="100000">
+              <a:schemeClr val="phClr">
+                <a:shade val="63000"/>
+                <a:satMod val="120000"/>
+              </a:schemeClr>
+            </a:gs>
+          </a:gsLst>
+          <a:lin ang="5400000" scaled="0"/>
+        </a:gradFill>
+      </a:bgFillStyleLst>
+    </a:fmtScheme>
+  </a:themeElements>
+  <a:objectDefaults>
+    <a:lnDef>
+      <a:spPr/>
+      <a:bodyPr/>
+      <a:lstStyle/>
+      <a:style>
+        <a:lnRef idx="2">
+          <a:schemeClr val="accent1"/>
+        </a:lnRef>
+        <a:fillRef idx="0">
+          <a:schemeClr val="accent1"/>
+        </a:fillRef>
+        <a:effectRef idx="1">
+          <a:schemeClr val="accent1"/>
+        </a:effectRef>
+        <a:fontRef idx="minor">
+          <a:schemeClr val="tx1"/>
+        </a:fontRef>
+      </a:style>
+    </a:lnDef>
+  </a:objectDefaults>
+  <a:extraClrSchemeLst/>
+  <a:extLst>
+    <a:ext uri="{05A4C25C-085E-4340-85A3-A5531E510DB2}">
+      <thm15:themeFamily xmlns:thm15="http://schemas.microsoft.com/office/thememl/2012/main" name="Office Theme" id="{2E142A2C-CD16-42D6-873A-C26D2A0506FA}" vid="{1BDDFF52-6CD6-40A5-AB3C-68EB2F1E4D0A}"/>
+    </a:ext>
+  </a:extLst>
+</a:theme>
 </file>